--- a/dist/초3/과학/생물/초3_과학_생물_03_식물의한살이_학생용.pptx
+++ b/dist/초3/과학/생물/초3_과학_생물_03_식물의한살이_학생용.pptx
@@ -120,13 +120,13 @@
   <p:extLst>
     <p:ext uri="{521415D9-36F7-43E2-AB2F-B90AF26B5E84}">
       <p14:sectionLst xmlns:p14="http://schemas.microsoft.com/office/powerpoint/2010/main">
-        <p14:section name="도입" id="{6cdcdfa0-5f2d-064d-18aa-d190f4bf6aea}">
+        <p14:section name="도입" id="{356f0f39-e4b6-4d23-8d61-6c580bd424ae}">
           <p14:sldIdLst>
             <p14:sldId id="256"/>
             <p14:sldId id="257"/>
           </p14:sldIdLst>
         </p14:section>
-        <p14:section name="개념" id="{190db9b2-40d6-4cf6-af02-5875375cfaab}">
+        <p14:section name="개념" id="{3ec6fcd2-197e-ec89-b88d-e454640dccc4}">
           <p14:sldIdLst>
             <p14:sldId id="258"/>
             <p14:sldId id="259"/>
@@ -136,24 +136,24 @@
             <p14:sldId id="263"/>
           </p14:sldIdLst>
         </p14:section>
-        <p14:section name="연습" id="{5a3c9bdd-1bfe-1a57-9b57-7dc3a5c5680b}">
+        <p14:section name="연습" id="{14e667b0-470b-3363-28e2-a45bab740f57}">
           <p14:sldIdLst>
             <p14:sldId id="264"/>
             <p14:sldId id="265"/>
             <p14:sldId id="266"/>
           </p14:sldIdLst>
         </p14:section>
-        <p14:section name="확인" id="{661a2af2-37bd-ec42-5de7-32908752dc09}">
+        <p14:section name="확인" id="{1edaa37d-0db0-b222-45ee-3412f64535e3}">
           <p14:sldIdLst>
             <p14:sldId id="267"/>
           </p14:sldIdLst>
         </p14:section>
-        <p14:section name="정리" id="{d7533c33-24d8-4493-f493-cb32fc6652b8}">
+        <p14:section name="정리" id="{4ab81601-dd09-9af8-da19-400e5cb2f531}">
           <p14:sldIdLst>
             <p14:sldId id="268"/>
           </p14:sldIdLst>
         </p14:section>
-        <p14:section name="보충" id="{4bf8446c-dbb7-9576-7f6d-946dcca3da92}">
+        <p14:section name="보충" id="{7e630b99-8d15-737a-f62c-633bb52d82b0}">
           <p14:sldIdLst>
             <p14:sldId id="269"/>
           </p14:sldIdLst>
